--- a/dr/Защита.pptx
+++ b/dr/Защита.pptx
@@ -116,6 +116,22 @@
       </a:defRPr>
     </a:lvl9pPr>
   </p:defaultTextStyle>
+  <p:extLst>
+    <p:ext uri="{EFAFB233-063F-42B5-8137-9DF3F51BA10A}">
+      <p15:sldGuideLst xmlns:p15="http://schemas.microsoft.com/office/powerpoint/2012/main">
+        <p15:guide id="1" orient="horz" pos="1620">
+          <p15:clr>
+            <a:srgbClr val="A4A3A4"/>
+          </p15:clr>
+        </p15:guide>
+        <p15:guide id="2" pos="2880">
+          <p15:clr>
+            <a:srgbClr val="A4A3A4"/>
+          </p15:clr>
+        </p15:guide>
+      </p15:sldGuideLst>
+    </p:ext>
+  </p:extLst>
 </p:presentation>
 </file>
 
@@ -201,7 +217,7 @@
           <a:p>
             <a:fld id="{44C39BC1-C62F-4E5E-AE15-E3327B7BFADF}" type="datetimeFigureOut">
               <a:rPr lang="bg-BG" smtClean="0"/>
-              <a:t>15.5.2025 г.</a:t>
+              <a:t>21.5.2025 г.</a:t>
             </a:fld>
             <a:endParaRPr lang="bg-BG"/>
           </a:p>
@@ -1740,7 +1756,7 @@
           <a:p>
             <a:fld id="{543075E4-F4D0-4694-8BA4-DFB069B80F62}" type="datetimeFigureOut">
               <a:rPr lang="bg-BG" smtClean="0"/>
-              <a:t>15.5.2025 г.</a:t>
+              <a:t>21.5.2025 г.</a:t>
             </a:fld>
             <a:endParaRPr lang="bg-BG"/>
           </a:p>
@@ -1905,7 +1921,7 @@
           <a:p>
             <a:fld id="{543075E4-F4D0-4694-8BA4-DFB069B80F62}" type="datetimeFigureOut">
               <a:rPr lang="bg-BG" smtClean="0"/>
-              <a:t>15.5.2025 г.</a:t>
+              <a:t>21.5.2025 г.</a:t>
             </a:fld>
             <a:endParaRPr lang="bg-BG"/>
           </a:p>
@@ -2080,7 +2096,7 @@
           <a:p>
             <a:fld id="{543075E4-F4D0-4694-8BA4-DFB069B80F62}" type="datetimeFigureOut">
               <a:rPr lang="bg-BG" smtClean="0"/>
-              <a:t>15.5.2025 г.</a:t>
+              <a:t>21.5.2025 г.</a:t>
             </a:fld>
             <a:endParaRPr lang="bg-BG"/>
           </a:p>
@@ -2245,7 +2261,7 @@
           <a:p>
             <a:fld id="{543075E4-F4D0-4694-8BA4-DFB069B80F62}" type="datetimeFigureOut">
               <a:rPr lang="bg-BG" smtClean="0"/>
-              <a:t>15.5.2025 г.</a:t>
+              <a:t>21.5.2025 г.</a:t>
             </a:fld>
             <a:endParaRPr lang="bg-BG"/>
           </a:p>
@@ -2487,7 +2503,7 @@
           <a:p>
             <a:fld id="{543075E4-F4D0-4694-8BA4-DFB069B80F62}" type="datetimeFigureOut">
               <a:rPr lang="bg-BG" smtClean="0"/>
-              <a:t>15.5.2025 г.</a:t>
+              <a:t>21.5.2025 г.</a:t>
             </a:fld>
             <a:endParaRPr lang="bg-BG"/>
           </a:p>
@@ -2751,7 +2767,7 @@
           <a:p>
             <a:fld id="{543075E4-F4D0-4694-8BA4-DFB069B80F62}" type="datetimeFigureOut">
               <a:rPr lang="bg-BG" smtClean="0"/>
-              <a:t>15.5.2025 г.</a:t>
+              <a:t>21.5.2025 г.</a:t>
             </a:fld>
             <a:endParaRPr lang="bg-BG"/>
           </a:p>
@@ -3129,7 +3145,7 @@
           <a:p>
             <a:fld id="{543075E4-F4D0-4694-8BA4-DFB069B80F62}" type="datetimeFigureOut">
               <a:rPr lang="bg-BG" smtClean="0"/>
-              <a:t>15.5.2025 г.</a:t>
+              <a:t>21.5.2025 г.</a:t>
             </a:fld>
             <a:endParaRPr lang="bg-BG"/>
           </a:p>
@@ -3279,7 +3295,7 @@
           <a:p>
             <a:fld id="{543075E4-F4D0-4694-8BA4-DFB069B80F62}" type="datetimeFigureOut">
               <a:rPr lang="bg-BG" smtClean="0"/>
-              <a:t>15.5.2025 г.</a:t>
+              <a:t>21.5.2025 г.</a:t>
             </a:fld>
             <a:endParaRPr lang="bg-BG"/>
           </a:p>
@@ -3369,7 +3385,7 @@
           <a:p>
             <a:fld id="{543075E4-F4D0-4694-8BA4-DFB069B80F62}" type="datetimeFigureOut">
               <a:rPr lang="bg-BG" smtClean="0"/>
-              <a:t>15.5.2025 г.</a:t>
+              <a:t>21.5.2025 г.</a:t>
             </a:fld>
             <a:endParaRPr lang="bg-BG"/>
           </a:p>
@@ -3630,7 +3646,7 @@
           <a:p>
             <a:fld id="{543075E4-F4D0-4694-8BA4-DFB069B80F62}" type="datetimeFigureOut">
               <a:rPr lang="bg-BG" smtClean="0"/>
-              <a:t>15.5.2025 г.</a:t>
+              <a:t>21.5.2025 г.</a:t>
             </a:fld>
             <a:endParaRPr lang="bg-BG"/>
           </a:p>
@@ -3918,7 +3934,7 @@
           <a:p>
             <a:fld id="{543075E4-F4D0-4694-8BA4-DFB069B80F62}" type="datetimeFigureOut">
               <a:rPr lang="bg-BG" smtClean="0"/>
-              <a:t>15.5.2025 г.</a:t>
+              <a:t>21.5.2025 г.</a:t>
             </a:fld>
             <a:endParaRPr lang="bg-BG"/>
           </a:p>
@@ -4689,7 +4705,7 @@
           <a:p>
             <a:fld id="{543075E4-F4D0-4694-8BA4-DFB069B80F62}" type="datetimeFigureOut">
               <a:rPr lang="bg-BG" smtClean="0"/>
-              <a:t>15.5.2025 г.</a:t>
+              <a:t>21.5.2025 г.</a:t>
             </a:fld>
             <a:endParaRPr lang="bg-BG"/>
           </a:p>
@@ -5678,18 +5694,18 @@
           <a:lstStyle/>
           <a:p>
             <a:r>
-              <a:rPr lang="en-US" sz="3600" b="1" dirty="0" smtClean="0">
+              <a:rPr lang="bg-BG" sz="3600" b="1" dirty="0" smtClean="0">
                 <a:latin typeface="Times New Roman" panose="02020603050405020304" pitchFamily="18" charset="0"/>
                 <a:cs typeface="Times New Roman" panose="02020603050405020304" pitchFamily="18" charset="0"/>
               </a:rPr>
-              <a:t>1.</a:t>
+              <a:t>Въведение </a:t>
             </a:r>
             <a:r>
               <a:rPr lang="bg-BG" sz="3600" b="1" dirty="0">
                 <a:latin typeface="Times New Roman" panose="02020603050405020304" pitchFamily="18" charset="0"/>
                 <a:cs typeface="Times New Roman" panose="02020603050405020304" pitchFamily="18" charset="0"/>
               </a:rPr>
-              <a:t>Въведение в </a:t>
+              <a:t>в </a:t>
             </a:r>
             <a:r>
               <a:rPr lang="en-US" sz="3600" b="1" dirty="0" smtClean="0">
@@ -5809,13 +5825,6 @@
           </a:bodyPr>
           <a:lstStyle/>
           <a:p>
-            <a:r>
-              <a:rPr lang="en-US" sz="3200" b="1" cap="small" dirty="0" smtClean="0">
-                <a:latin typeface="Times New Roman" panose="02020603050405020304" pitchFamily="18" charset="0"/>
-                <a:cs typeface="Times New Roman" panose="02020603050405020304" pitchFamily="18" charset="0"/>
-              </a:rPr>
-              <a:t>2.</a:t>
-            </a:r>
             <a:r>
               <a:rPr lang="bg-BG" sz="3200" b="1" cap="small" dirty="0" smtClean="0">
                 <a:latin typeface="Times New Roman" panose="02020603050405020304" pitchFamily="18" charset="0"/>
@@ -5947,18 +5956,18 @@
           <a:lstStyle/>
           <a:p>
             <a:r>
-              <a:rPr lang="en-US" sz="4400" dirty="0" smtClean="0">
+              <a:rPr lang="bg-BG" sz="4400" b="1" cap="small" dirty="0" smtClean="0">
                 <a:latin typeface="Times New Roman" panose="02020603050405020304" pitchFamily="18" charset="0"/>
                 <a:cs typeface="Times New Roman" panose="02020603050405020304" pitchFamily="18" charset="0"/>
               </a:rPr>
-              <a:t>3. </a:t>
+              <a:t>Основни </a:t>
             </a:r>
             <a:r>
               <a:rPr lang="bg-BG" sz="4400" b="1" cap="small" dirty="0">
                 <a:latin typeface="Times New Roman" panose="02020603050405020304" pitchFamily="18" charset="0"/>
                 <a:cs typeface="Times New Roman" panose="02020603050405020304" pitchFamily="18" charset="0"/>
               </a:rPr>
-              <a:t>Основни принципи на Django</a:t>
+              <a:t>принципи на Django</a:t>
             </a:r>
             <a:r>
               <a:rPr lang="bg-BG" b="1" cap="small" dirty="0"/>
@@ -6078,8 +6087,8 @@
         </p:nvSpPr>
         <p:spPr>
           <a:xfrm>
-            <a:off x="338336" y="483518"/>
-            <a:ext cx="8805664" cy="1909910"/>
+            <a:off x="169168" y="771550"/>
+            <a:ext cx="8805664" cy="1152128"/>
           </a:xfrm>
         </p:spPr>
         <p:txBody>
@@ -6131,32 +6140,14 @@
               <a:rPr lang="bg-BG" b="1" cap="small" dirty="0"/>
             </a:br>
             <a:r>
-              <a:rPr lang="bg-BG" sz="4000" b="1" cap="small" dirty="0" smtClean="0"/>
-              <a:t>                                                             </a:t>
-            </a:r>
-            <a:r>
-              <a:rPr lang="ru-RU" sz="4000" b="1" cap="small" dirty="0" smtClean="0">
-                <a:latin typeface="Times New Roman" panose="02020603050405020304" pitchFamily="18" charset="0"/>
-                <a:cs typeface="Times New Roman" panose="02020603050405020304" pitchFamily="18" charset="0"/>
-              </a:rPr>
-              <a:t>5</a:t>
-            </a:r>
-            <a:r>
-              <a:rPr lang="en-US" sz="4000" b="1" cap="small" dirty="0" smtClean="0">
-                <a:latin typeface="Times New Roman" panose="02020603050405020304" pitchFamily="18" charset="0"/>
-                <a:cs typeface="Times New Roman" panose="02020603050405020304" pitchFamily="18" charset="0"/>
-              </a:rPr>
-              <a:t>.</a:t>
-            </a:r>
-            <a:r>
-              <a:rPr lang="ru-RU" sz="4000" b="1" cap="small" dirty="0" smtClean="0">
+              <a:rPr lang="ru-RU" sz="3600" b="1" cap="small" dirty="0" smtClean="0">
                 <a:latin typeface="Times New Roman" panose="02020603050405020304" pitchFamily="18" charset="0"/>
                 <a:cs typeface="Times New Roman" panose="02020603050405020304" pitchFamily="18" charset="0"/>
               </a:rPr>
               <a:t>Структура </a:t>
             </a:r>
             <a:r>
-              <a:rPr lang="ru-RU" sz="4000" b="1" cap="small" dirty="0">
+              <a:rPr lang="ru-RU" sz="3600" b="1" cap="small" dirty="0">
                 <a:latin typeface="Times New Roman" panose="02020603050405020304" pitchFamily="18" charset="0"/>
                 <a:cs typeface="Times New Roman" panose="02020603050405020304" pitchFamily="18" charset="0"/>
               </a:rPr>
@@ -6311,18 +6302,18 @@
           <a:lstStyle/>
           <a:p>
             <a:r>
-              <a:rPr lang="en-US" sz="4000" dirty="0" smtClean="0">
+              <a:rPr lang="bg-BG" sz="4000" b="1" cap="small" dirty="0" smtClean="0">
                 <a:latin typeface="Times New Roman" panose="02020603050405020304" pitchFamily="18" charset="0"/>
                 <a:cs typeface="Times New Roman" panose="02020603050405020304" pitchFamily="18" charset="0"/>
               </a:rPr>
-              <a:t>6.</a:t>
+              <a:t>Административен </a:t>
             </a:r>
             <a:r>
               <a:rPr lang="bg-BG" sz="4000" b="1" cap="small" dirty="0">
                 <a:latin typeface="Times New Roman" panose="02020603050405020304" pitchFamily="18" charset="0"/>
                 <a:cs typeface="Times New Roman" panose="02020603050405020304" pitchFamily="18" charset="0"/>
               </a:rPr>
-              <a:t> Административен панел</a:t>
+              <a:t>панел</a:t>
             </a:r>
             <a:r>
               <a:rPr lang="bg-BG" b="1" cap="small" dirty="0"/>
@@ -6463,29 +6454,29 @@
         </p:nvSpPr>
         <p:spPr>
           <a:xfrm>
-            <a:off x="539552" y="123478"/>
-            <a:ext cx="8229600" cy="2125934"/>
+            <a:off x="3275856" y="123478"/>
+            <a:ext cx="5493296" cy="1872208"/>
           </a:xfrm>
         </p:spPr>
         <p:txBody>
           <a:bodyPr>
-            <a:normAutofit/>
+            <a:normAutofit fontScale="90000"/>
           </a:bodyPr>
           <a:lstStyle/>
           <a:p>
             <a:r>
-              <a:rPr lang="en-US" sz="4000" dirty="0" smtClean="0">
+              <a:rPr lang="bg-BG" sz="4000" b="1" cap="small" dirty="0" smtClean="0">
                 <a:latin typeface="Times New Roman" panose="02020603050405020304" pitchFamily="18" charset="0"/>
                 <a:cs typeface="Times New Roman" panose="02020603050405020304" pitchFamily="18" charset="0"/>
               </a:rPr>
-              <a:t>7.</a:t>
+              <a:t>Работа </a:t>
             </a:r>
             <a:r>
               <a:rPr lang="bg-BG" sz="4000" b="1" cap="small" dirty="0">
                 <a:latin typeface="Times New Roman" panose="02020603050405020304" pitchFamily="18" charset="0"/>
                 <a:cs typeface="Times New Roman" panose="02020603050405020304" pitchFamily="18" charset="0"/>
               </a:rPr>
-              <a:t> Работа със статични файлове и медия</a:t>
+              <a:t>със статични файлове и медия</a:t>
             </a:r>
             <a:br>
               <a:rPr lang="bg-BG" sz="4000" b="1" cap="small" dirty="0">
@@ -6525,7 +6516,7 @@
         </p:blipFill>
         <p:spPr bwMode="auto">
           <a:xfrm>
-            <a:off x="904363" y="1604158"/>
+            <a:off x="1547664" y="1851670"/>
             <a:ext cx="7335274" cy="2986505"/>
           </a:xfrm>
           <a:prstGeom prst="rect">
@@ -6560,6 +6551,30 @@
               </a14:hiddenLine>
             </a:ext>
           </a:extLst>
+        </p:spPr>
+      </p:pic>
+      <p:pic>
+        <p:nvPicPr>
+          <p:cNvPr id="2" name="Picture 1"/>
+          <p:cNvPicPr>
+            <a:picLocks noChangeAspect="1"/>
+          </p:cNvPicPr>
+          <p:nvPr/>
+        </p:nvPicPr>
+        <p:blipFill>
+          <a:blip r:embed="rId4"/>
+          <a:stretch>
+            <a:fillRect/>
+          </a:stretch>
+        </p:blipFill>
+        <p:spPr>
+          <a:xfrm>
+            <a:off x="251520" y="248355"/>
+            <a:ext cx="2304256" cy="4705026"/>
+          </a:xfrm>
+          <a:prstGeom prst="rect">
+            <a:avLst/>
+          </a:prstGeom>
         </p:spPr>
       </p:pic>
     </p:spTree>
@@ -6634,18 +6649,18 @@
           <a:lstStyle/>
           <a:p>
             <a:r>
-              <a:rPr lang="en-US" sz="4000" dirty="0" smtClean="0">
-                <a:latin typeface="Times New Roman" panose="02020603050405020304" pitchFamily="18" charset="0"/>
-                <a:cs typeface="Times New Roman" panose="02020603050405020304" pitchFamily="18" charset="0"/>
-              </a:rPr>
-              <a:t>8.</a:t>
-            </a:r>
-            <a:r>
               <a:rPr lang="bg-BG" sz="4000" dirty="0" smtClean="0">
                 <a:latin typeface="Times New Roman" panose="02020603050405020304" pitchFamily="18" charset="0"/>
                 <a:cs typeface="Times New Roman" panose="02020603050405020304" pitchFamily="18" charset="0"/>
               </a:rPr>
-              <a:t> Сигурност на </a:t>
+              <a:t>Сигурност </a:t>
+            </a:r>
+            <a:r>
+              <a:rPr lang="bg-BG" sz="4000" dirty="0" smtClean="0">
+                <a:latin typeface="Times New Roman" panose="02020603050405020304" pitchFamily="18" charset="0"/>
+                <a:cs typeface="Times New Roman" panose="02020603050405020304" pitchFamily="18" charset="0"/>
+              </a:rPr>
+              <a:t>на </a:t>
             </a:r>
             <a:r>
               <a:rPr lang="en-US" sz="4000" dirty="0" smtClean="0">
@@ -6774,18 +6789,18 @@
           <a:lstStyle/>
           <a:p>
             <a:r>
-              <a:rPr lang="en-US" sz="4000" dirty="0" smtClean="0">
-                <a:latin typeface="Times New Roman" panose="02020603050405020304" pitchFamily="18" charset="0"/>
-                <a:cs typeface="Times New Roman" panose="02020603050405020304" pitchFamily="18" charset="0"/>
-              </a:rPr>
-              <a:t>9.</a:t>
-            </a:r>
-            <a:r>
               <a:rPr lang="bg-BG" sz="4000" dirty="0" smtClean="0">
                 <a:latin typeface="Times New Roman" panose="02020603050405020304" pitchFamily="18" charset="0"/>
                 <a:cs typeface="Times New Roman" panose="02020603050405020304" pitchFamily="18" charset="0"/>
               </a:rPr>
-              <a:t>Работа с база данни</a:t>
+              <a:t>Работа </a:t>
+            </a:r>
+            <a:r>
+              <a:rPr lang="bg-BG" sz="4000" dirty="0" smtClean="0">
+                <a:latin typeface="Times New Roman" panose="02020603050405020304" pitchFamily="18" charset="0"/>
+                <a:cs typeface="Times New Roman" panose="02020603050405020304" pitchFamily="18" charset="0"/>
+              </a:rPr>
+              <a:t>с база данни</a:t>
             </a:r>
             <a:endParaRPr lang="bg-BG" sz="4000" dirty="0">
               <a:latin typeface="Times New Roman" panose="02020603050405020304" pitchFamily="18" charset="0"/>
